--- a/assets/pptx/catalog-96.pptx
+++ b/assets/pptx/catalog-96.pptx
@@ -3300,7 +3300,7 @@
                 <a:ea typeface="Ebrima"/>
                 <a:cs typeface="Ebrima"/>
               </a:rPr>
-              <a:t>እገዛልሃለሁ ዛሬም በደስታዛሬም በደስታ (2x)</a:t>
+              <a:t>እገዛልሃለሁ ዛሬም በደስታዛሬም በደስታ 2x</a:t>
             </a:r>
           </a:p>
         </p:txBody>
@@ -3542,7 +3542,7 @@
                 <a:ea typeface="Ebrima"/>
                 <a:cs typeface="Ebrima"/>
               </a:rPr>
-              <a:t>የወደድከኝ ጌታ ለዘላለም ግዛኝ ለዘላለም ግዛኝ (2x)</a:t>
+              <a:t>የወደድከኝ ጌታ ለዘላለም ግዛኝ ለዘላለም ግዛኝ 2x</a:t>
             </a:r>
           </a:p>
         </p:txBody>
@@ -3784,7 +3784,7 @@
                 <a:ea typeface="Ebrima"/>
                 <a:cs typeface="Ebrima"/>
               </a:rPr>
-              <a:t>እጆቼን አንስቼ ግዛኝ እልሃለሁ ግዛኝ እልሃለሁ (2x)</a:t>
+              <a:t>እጆቼን አንስቼ ግዛኝ እልሃለሁ ግዛኝ እልሃለሁ 2x</a:t>
             </a:r>
           </a:p>
         </p:txBody>
